--- a/深觸我心(崇拜版).pptx
+++ b/深觸我心(崇拜版).pptx
@@ -167,10 +167,9 @@
           <a:lstStyle/>
           <a:p>
             <a:r>
-              <a:rPr lang="zh-TW" altLang="en-US" smtClean="0"/>
+              <a:rPr lang="zh-TW" altLang="en-US"/>
               <a:t>按一下以編輯母片標題樣式</a:t>
             </a:r>
-            <a:endParaRPr lang="zh-TW" altLang="en-US"/>
           </a:p>
         </p:txBody>
       </p:sp>
@@ -286,10 +285,9 @@
           </a:lstStyle>
           <a:p>
             <a:r>
-              <a:rPr lang="zh-TW" altLang="en-US" smtClean="0"/>
+              <a:rPr lang="zh-TW" altLang="en-US"/>
               <a:t>按一下以編輯母片副標題樣式</a:t>
             </a:r>
-            <a:endParaRPr lang="zh-TW" altLang="en-US"/>
           </a:p>
         </p:txBody>
       </p:sp>
@@ -310,7 +308,7 @@
           <a:p>
             <a:fld id="{1D20DF1E-6BA7-44B4-B91F-E3ABF1C171B9}" type="datetimeFigureOut">
               <a:rPr lang="zh-TW" altLang="en-US" smtClean="0"/>
-              <a:t>2022/9/24</a:t>
+              <a:t>2025/10/31</a:t>
             </a:fld>
             <a:endParaRPr lang="zh-TW" altLang="en-US"/>
           </a:p>
@@ -399,10 +397,9 @@
           <a:lstStyle/>
           <a:p>
             <a:r>
-              <a:rPr lang="zh-TW" altLang="en-US" smtClean="0"/>
+              <a:rPr lang="zh-TW" altLang="en-US"/>
               <a:t>按一下以編輯母片標題樣式</a:t>
             </a:r>
-            <a:endParaRPr lang="zh-TW" altLang="en-US"/>
           </a:p>
         </p:txBody>
       </p:sp>
@@ -423,38 +420,37 @@
           <a:p>
             <a:pPr lvl="0"/>
             <a:r>
-              <a:rPr lang="zh-TW" altLang="en-US" smtClean="0"/>
+              <a:rPr lang="zh-TW" altLang="en-US"/>
               <a:t>按一下以編輯母片文字樣式</a:t>
             </a:r>
           </a:p>
           <a:p>
             <a:pPr lvl="1"/>
             <a:r>
-              <a:rPr lang="zh-TW" altLang="en-US" smtClean="0"/>
+              <a:rPr lang="zh-TW" altLang="en-US"/>
               <a:t>第二層</a:t>
             </a:r>
           </a:p>
           <a:p>
             <a:pPr lvl="2"/>
             <a:r>
-              <a:rPr lang="zh-TW" altLang="en-US" smtClean="0"/>
+              <a:rPr lang="zh-TW" altLang="en-US"/>
               <a:t>第三層</a:t>
             </a:r>
           </a:p>
           <a:p>
             <a:pPr lvl="3"/>
             <a:r>
-              <a:rPr lang="zh-TW" altLang="en-US" smtClean="0"/>
+              <a:rPr lang="zh-TW" altLang="en-US"/>
               <a:t>第四層</a:t>
             </a:r>
           </a:p>
           <a:p>
             <a:pPr lvl="4"/>
             <a:r>
-              <a:rPr lang="zh-TW" altLang="en-US" smtClean="0"/>
+              <a:rPr lang="zh-TW" altLang="en-US"/>
               <a:t>第五層</a:t>
             </a:r>
-            <a:endParaRPr lang="zh-TW" altLang="en-US"/>
           </a:p>
         </p:txBody>
       </p:sp>
@@ -475,7 +471,7 @@
           <a:p>
             <a:fld id="{1D20DF1E-6BA7-44B4-B91F-E3ABF1C171B9}" type="datetimeFigureOut">
               <a:rPr lang="zh-TW" altLang="en-US" smtClean="0"/>
-              <a:t>2022/9/24</a:t>
+              <a:t>2025/10/31</a:t>
             </a:fld>
             <a:endParaRPr lang="zh-TW" altLang="en-US"/>
           </a:p>
@@ -569,10 +565,9 @@
           <a:lstStyle/>
           <a:p>
             <a:r>
-              <a:rPr lang="zh-TW" altLang="en-US" smtClean="0"/>
+              <a:rPr lang="zh-TW" altLang="en-US"/>
               <a:t>按一下以編輯母片標題樣式</a:t>
             </a:r>
-            <a:endParaRPr lang="zh-TW" altLang="en-US"/>
           </a:p>
         </p:txBody>
       </p:sp>
@@ -598,38 +593,37 @@
           <a:p>
             <a:pPr lvl="0"/>
             <a:r>
-              <a:rPr lang="zh-TW" altLang="en-US" smtClean="0"/>
+              <a:rPr lang="zh-TW" altLang="en-US"/>
               <a:t>按一下以編輯母片文字樣式</a:t>
             </a:r>
           </a:p>
           <a:p>
             <a:pPr lvl="1"/>
             <a:r>
-              <a:rPr lang="zh-TW" altLang="en-US" smtClean="0"/>
+              <a:rPr lang="zh-TW" altLang="en-US"/>
               <a:t>第二層</a:t>
             </a:r>
           </a:p>
           <a:p>
             <a:pPr lvl="2"/>
             <a:r>
-              <a:rPr lang="zh-TW" altLang="en-US" smtClean="0"/>
+              <a:rPr lang="zh-TW" altLang="en-US"/>
               <a:t>第三層</a:t>
             </a:r>
           </a:p>
           <a:p>
             <a:pPr lvl="3"/>
             <a:r>
-              <a:rPr lang="zh-TW" altLang="en-US" smtClean="0"/>
+              <a:rPr lang="zh-TW" altLang="en-US"/>
               <a:t>第四層</a:t>
             </a:r>
           </a:p>
           <a:p>
             <a:pPr lvl="4"/>
             <a:r>
-              <a:rPr lang="zh-TW" altLang="en-US" smtClean="0"/>
+              <a:rPr lang="zh-TW" altLang="en-US"/>
               <a:t>第五層</a:t>
             </a:r>
-            <a:endParaRPr lang="zh-TW" altLang="en-US"/>
           </a:p>
         </p:txBody>
       </p:sp>
@@ -650,7 +644,7 @@
           <a:p>
             <a:fld id="{1D20DF1E-6BA7-44B4-B91F-E3ABF1C171B9}" type="datetimeFigureOut">
               <a:rPr lang="zh-TW" altLang="en-US" smtClean="0"/>
-              <a:t>2022/9/24</a:t>
+              <a:t>2025/10/31</a:t>
             </a:fld>
             <a:endParaRPr lang="zh-TW" altLang="en-US"/>
           </a:p>
@@ -739,10 +733,9 @@
           <a:lstStyle/>
           <a:p>
             <a:r>
-              <a:rPr lang="zh-TW" altLang="en-US" smtClean="0"/>
+              <a:rPr lang="zh-TW" altLang="en-US"/>
               <a:t>按一下以編輯母片標題樣式</a:t>
             </a:r>
-            <a:endParaRPr lang="zh-TW" altLang="en-US"/>
           </a:p>
         </p:txBody>
       </p:sp>
@@ -763,38 +756,37 @@
           <a:p>
             <a:pPr lvl="0"/>
             <a:r>
-              <a:rPr lang="zh-TW" altLang="en-US" smtClean="0"/>
+              <a:rPr lang="zh-TW" altLang="en-US"/>
               <a:t>按一下以編輯母片文字樣式</a:t>
             </a:r>
           </a:p>
           <a:p>
             <a:pPr lvl="1"/>
             <a:r>
-              <a:rPr lang="zh-TW" altLang="en-US" smtClean="0"/>
+              <a:rPr lang="zh-TW" altLang="en-US"/>
               <a:t>第二層</a:t>
             </a:r>
           </a:p>
           <a:p>
             <a:pPr lvl="2"/>
             <a:r>
-              <a:rPr lang="zh-TW" altLang="en-US" smtClean="0"/>
+              <a:rPr lang="zh-TW" altLang="en-US"/>
               <a:t>第三層</a:t>
             </a:r>
           </a:p>
           <a:p>
             <a:pPr lvl="3"/>
             <a:r>
-              <a:rPr lang="zh-TW" altLang="en-US" smtClean="0"/>
+              <a:rPr lang="zh-TW" altLang="en-US"/>
               <a:t>第四層</a:t>
             </a:r>
           </a:p>
           <a:p>
             <a:pPr lvl="4"/>
             <a:r>
-              <a:rPr lang="zh-TW" altLang="en-US" smtClean="0"/>
+              <a:rPr lang="zh-TW" altLang="en-US"/>
               <a:t>第五層</a:t>
             </a:r>
-            <a:endParaRPr lang="zh-TW" altLang="en-US"/>
           </a:p>
         </p:txBody>
       </p:sp>
@@ -815,7 +807,7 @@
           <a:p>
             <a:fld id="{1D20DF1E-6BA7-44B4-B91F-E3ABF1C171B9}" type="datetimeFigureOut">
               <a:rPr lang="zh-TW" altLang="en-US" smtClean="0"/>
-              <a:t>2022/9/24</a:t>
+              <a:t>2025/10/31</a:t>
             </a:fld>
             <a:endParaRPr lang="zh-TW" altLang="en-US"/>
           </a:p>
@@ -913,10 +905,9 @@
           </a:lstStyle>
           <a:p>
             <a:r>
-              <a:rPr lang="zh-TW" altLang="en-US" smtClean="0"/>
+              <a:rPr lang="zh-TW" altLang="en-US"/>
               <a:t>按一下以編輯母片標題樣式</a:t>
             </a:r>
-            <a:endParaRPr lang="zh-TW" altLang="en-US"/>
           </a:p>
         </p:txBody>
       </p:sp>
@@ -1033,7 +1024,7 @@
           <a:p>
             <a:pPr lvl="0"/>
             <a:r>
-              <a:rPr lang="zh-TW" altLang="en-US" smtClean="0"/>
+              <a:rPr lang="zh-TW" altLang="en-US"/>
               <a:t>按一下以編輯母片文字樣式</a:t>
             </a:r>
           </a:p>
@@ -1056,7 +1047,7 @@
           <a:p>
             <a:fld id="{1D20DF1E-6BA7-44B4-B91F-E3ABF1C171B9}" type="datetimeFigureOut">
               <a:rPr lang="zh-TW" altLang="en-US" smtClean="0"/>
-              <a:t>2022/9/24</a:t>
+              <a:t>2025/10/31</a:t>
             </a:fld>
             <a:endParaRPr lang="zh-TW" altLang="en-US"/>
           </a:p>
@@ -1145,10 +1136,9 @@
           <a:lstStyle/>
           <a:p>
             <a:r>
-              <a:rPr lang="zh-TW" altLang="en-US" smtClean="0"/>
+              <a:rPr lang="zh-TW" altLang="en-US"/>
               <a:t>按一下以編輯母片標題樣式</a:t>
             </a:r>
-            <a:endParaRPr lang="zh-TW" altLang="en-US"/>
           </a:p>
         </p:txBody>
       </p:sp>
@@ -1202,38 +1192,37 @@
           <a:p>
             <a:pPr lvl="0"/>
             <a:r>
-              <a:rPr lang="zh-TW" altLang="en-US" smtClean="0"/>
+              <a:rPr lang="zh-TW" altLang="en-US"/>
               <a:t>按一下以編輯母片文字樣式</a:t>
             </a:r>
           </a:p>
           <a:p>
             <a:pPr lvl="1"/>
             <a:r>
-              <a:rPr lang="zh-TW" altLang="en-US" smtClean="0"/>
+              <a:rPr lang="zh-TW" altLang="en-US"/>
               <a:t>第二層</a:t>
             </a:r>
           </a:p>
           <a:p>
             <a:pPr lvl="2"/>
             <a:r>
-              <a:rPr lang="zh-TW" altLang="en-US" smtClean="0"/>
+              <a:rPr lang="zh-TW" altLang="en-US"/>
               <a:t>第三層</a:t>
             </a:r>
           </a:p>
           <a:p>
             <a:pPr lvl="3"/>
             <a:r>
-              <a:rPr lang="zh-TW" altLang="en-US" smtClean="0"/>
+              <a:rPr lang="zh-TW" altLang="en-US"/>
               <a:t>第四層</a:t>
             </a:r>
           </a:p>
           <a:p>
             <a:pPr lvl="4"/>
             <a:r>
-              <a:rPr lang="zh-TW" altLang="en-US" smtClean="0"/>
+              <a:rPr lang="zh-TW" altLang="en-US"/>
               <a:t>第五層</a:t>
             </a:r>
-            <a:endParaRPr lang="zh-TW" altLang="en-US"/>
           </a:p>
         </p:txBody>
       </p:sp>
@@ -1287,38 +1276,37 @@
           <a:p>
             <a:pPr lvl="0"/>
             <a:r>
-              <a:rPr lang="zh-TW" altLang="en-US" smtClean="0"/>
+              <a:rPr lang="zh-TW" altLang="en-US"/>
               <a:t>按一下以編輯母片文字樣式</a:t>
             </a:r>
           </a:p>
           <a:p>
             <a:pPr lvl="1"/>
             <a:r>
-              <a:rPr lang="zh-TW" altLang="en-US" smtClean="0"/>
+              <a:rPr lang="zh-TW" altLang="en-US"/>
               <a:t>第二層</a:t>
             </a:r>
           </a:p>
           <a:p>
             <a:pPr lvl="2"/>
             <a:r>
-              <a:rPr lang="zh-TW" altLang="en-US" smtClean="0"/>
+              <a:rPr lang="zh-TW" altLang="en-US"/>
               <a:t>第三層</a:t>
             </a:r>
           </a:p>
           <a:p>
             <a:pPr lvl="3"/>
             <a:r>
-              <a:rPr lang="zh-TW" altLang="en-US" smtClean="0"/>
+              <a:rPr lang="zh-TW" altLang="en-US"/>
               <a:t>第四層</a:t>
             </a:r>
           </a:p>
           <a:p>
             <a:pPr lvl="4"/>
             <a:r>
-              <a:rPr lang="zh-TW" altLang="en-US" smtClean="0"/>
+              <a:rPr lang="zh-TW" altLang="en-US"/>
               <a:t>第五層</a:t>
             </a:r>
-            <a:endParaRPr lang="zh-TW" altLang="en-US"/>
           </a:p>
         </p:txBody>
       </p:sp>
@@ -1339,7 +1327,7 @@
           <a:p>
             <a:fld id="{1D20DF1E-6BA7-44B4-B91F-E3ABF1C171B9}" type="datetimeFigureOut">
               <a:rPr lang="zh-TW" altLang="en-US" smtClean="0"/>
-              <a:t>2022/9/24</a:t>
+              <a:t>2025/10/31</a:t>
             </a:fld>
             <a:endParaRPr lang="zh-TW" altLang="en-US"/>
           </a:p>
@@ -1432,10 +1420,9 @@
           </a:lstStyle>
           <a:p>
             <a:r>
-              <a:rPr lang="zh-TW" altLang="en-US" smtClean="0"/>
+              <a:rPr lang="zh-TW" altLang="en-US"/>
               <a:t>按一下以編輯母片標題樣式</a:t>
             </a:r>
-            <a:endParaRPr lang="zh-TW" altLang="en-US"/>
           </a:p>
         </p:txBody>
       </p:sp>
@@ -1498,7 +1485,7 @@
           <a:p>
             <a:pPr lvl="0"/>
             <a:r>
-              <a:rPr lang="zh-TW" altLang="en-US" smtClean="0"/>
+              <a:rPr lang="zh-TW" altLang="en-US"/>
               <a:t>按一下以編輯母片文字樣式</a:t>
             </a:r>
           </a:p>
@@ -1554,38 +1541,37 @@
           <a:p>
             <a:pPr lvl="0"/>
             <a:r>
-              <a:rPr lang="zh-TW" altLang="en-US" smtClean="0"/>
+              <a:rPr lang="zh-TW" altLang="en-US"/>
               <a:t>按一下以編輯母片文字樣式</a:t>
             </a:r>
           </a:p>
           <a:p>
             <a:pPr lvl="1"/>
             <a:r>
-              <a:rPr lang="zh-TW" altLang="en-US" smtClean="0"/>
+              <a:rPr lang="zh-TW" altLang="en-US"/>
               <a:t>第二層</a:t>
             </a:r>
           </a:p>
           <a:p>
             <a:pPr lvl="2"/>
             <a:r>
-              <a:rPr lang="zh-TW" altLang="en-US" smtClean="0"/>
+              <a:rPr lang="zh-TW" altLang="en-US"/>
               <a:t>第三層</a:t>
             </a:r>
           </a:p>
           <a:p>
             <a:pPr lvl="3"/>
             <a:r>
-              <a:rPr lang="zh-TW" altLang="en-US" smtClean="0"/>
+              <a:rPr lang="zh-TW" altLang="en-US"/>
               <a:t>第四層</a:t>
             </a:r>
           </a:p>
           <a:p>
             <a:pPr lvl="4"/>
             <a:r>
-              <a:rPr lang="zh-TW" altLang="en-US" smtClean="0"/>
+              <a:rPr lang="zh-TW" altLang="en-US"/>
               <a:t>第五層</a:t>
             </a:r>
-            <a:endParaRPr lang="zh-TW" altLang="en-US"/>
           </a:p>
         </p:txBody>
       </p:sp>
@@ -1648,7 +1634,7 @@
           <a:p>
             <a:pPr lvl="0"/>
             <a:r>
-              <a:rPr lang="zh-TW" altLang="en-US" smtClean="0"/>
+              <a:rPr lang="zh-TW" altLang="en-US"/>
               <a:t>按一下以編輯母片文字樣式</a:t>
             </a:r>
           </a:p>
@@ -1704,38 +1690,37 @@
           <a:p>
             <a:pPr lvl="0"/>
             <a:r>
-              <a:rPr lang="zh-TW" altLang="en-US" smtClean="0"/>
+              <a:rPr lang="zh-TW" altLang="en-US"/>
               <a:t>按一下以編輯母片文字樣式</a:t>
             </a:r>
           </a:p>
           <a:p>
             <a:pPr lvl="1"/>
             <a:r>
-              <a:rPr lang="zh-TW" altLang="en-US" smtClean="0"/>
+              <a:rPr lang="zh-TW" altLang="en-US"/>
               <a:t>第二層</a:t>
             </a:r>
           </a:p>
           <a:p>
             <a:pPr lvl="2"/>
             <a:r>
-              <a:rPr lang="zh-TW" altLang="en-US" smtClean="0"/>
+              <a:rPr lang="zh-TW" altLang="en-US"/>
               <a:t>第三層</a:t>
             </a:r>
           </a:p>
           <a:p>
             <a:pPr lvl="3"/>
             <a:r>
-              <a:rPr lang="zh-TW" altLang="en-US" smtClean="0"/>
+              <a:rPr lang="zh-TW" altLang="en-US"/>
               <a:t>第四層</a:t>
             </a:r>
           </a:p>
           <a:p>
             <a:pPr lvl="4"/>
             <a:r>
-              <a:rPr lang="zh-TW" altLang="en-US" smtClean="0"/>
+              <a:rPr lang="zh-TW" altLang="en-US"/>
               <a:t>第五層</a:t>
             </a:r>
-            <a:endParaRPr lang="zh-TW" altLang="en-US"/>
           </a:p>
         </p:txBody>
       </p:sp>
@@ -1756,7 +1741,7 @@
           <a:p>
             <a:fld id="{1D20DF1E-6BA7-44B4-B91F-E3ABF1C171B9}" type="datetimeFigureOut">
               <a:rPr lang="zh-TW" altLang="en-US" smtClean="0"/>
-              <a:t>2022/9/24</a:t>
+              <a:t>2025/10/31</a:t>
             </a:fld>
             <a:endParaRPr lang="zh-TW" altLang="en-US"/>
           </a:p>
@@ -1845,10 +1830,9 @@
           <a:lstStyle/>
           <a:p>
             <a:r>
-              <a:rPr lang="zh-TW" altLang="en-US" smtClean="0"/>
+              <a:rPr lang="zh-TW" altLang="en-US"/>
               <a:t>按一下以編輯母片標題樣式</a:t>
             </a:r>
-            <a:endParaRPr lang="zh-TW" altLang="en-US"/>
           </a:p>
         </p:txBody>
       </p:sp>
@@ -1869,7 +1853,7 @@
           <a:p>
             <a:fld id="{1D20DF1E-6BA7-44B4-B91F-E3ABF1C171B9}" type="datetimeFigureOut">
               <a:rPr lang="zh-TW" altLang="en-US" smtClean="0"/>
-              <a:t>2022/9/24</a:t>
+              <a:t>2025/10/31</a:t>
             </a:fld>
             <a:endParaRPr lang="zh-TW" altLang="en-US"/>
           </a:p>
@@ -1959,7 +1943,7 @@
           <a:p>
             <a:fld id="{1D20DF1E-6BA7-44B4-B91F-E3ABF1C171B9}" type="datetimeFigureOut">
               <a:rPr lang="zh-TW" altLang="en-US" smtClean="0"/>
-              <a:t>2022/9/24</a:t>
+              <a:t>2025/10/31</a:t>
             </a:fld>
             <a:endParaRPr lang="zh-TW" altLang="en-US"/>
           </a:p>
@@ -2057,10 +2041,9 @@
           </a:lstStyle>
           <a:p>
             <a:r>
-              <a:rPr lang="zh-TW" altLang="en-US" smtClean="0"/>
+              <a:rPr lang="zh-TW" altLang="en-US"/>
               <a:t>按一下以編輯母片標題樣式</a:t>
             </a:r>
-            <a:endParaRPr lang="zh-TW" altLang="en-US"/>
           </a:p>
         </p:txBody>
       </p:sp>
@@ -2114,38 +2097,37 @@
           <a:p>
             <a:pPr lvl="0"/>
             <a:r>
-              <a:rPr lang="zh-TW" altLang="en-US" smtClean="0"/>
+              <a:rPr lang="zh-TW" altLang="en-US"/>
               <a:t>按一下以編輯母片文字樣式</a:t>
             </a:r>
           </a:p>
           <a:p>
             <a:pPr lvl="1"/>
             <a:r>
-              <a:rPr lang="zh-TW" altLang="en-US" smtClean="0"/>
+              <a:rPr lang="zh-TW" altLang="en-US"/>
               <a:t>第二層</a:t>
             </a:r>
           </a:p>
           <a:p>
             <a:pPr lvl="2"/>
             <a:r>
-              <a:rPr lang="zh-TW" altLang="en-US" smtClean="0"/>
+              <a:rPr lang="zh-TW" altLang="en-US"/>
               <a:t>第三層</a:t>
             </a:r>
           </a:p>
           <a:p>
             <a:pPr lvl="3"/>
             <a:r>
-              <a:rPr lang="zh-TW" altLang="en-US" smtClean="0"/>
+              <a:rPr lang="zh-TW" altLang="en-US"/>
               <a:t>第四層</a:t>
             </a:r>
           </a:p>
           <a:p>
             <a:pPr lvl="4"/>
             <a:r>
-              <a:rPr lang="zh-TW" altLang="en-US" smtClean="0"/>
+              <a:rPr lang="zh-TW" altLang="en-US"/>
               <a:t>第五層</a:t>
             </a:r>
-            <a:endParaRPr lang="zh-TW" altLang="en-US"/>
           </a:p>
         </p:txBody>
       </p:sp>
@@ -2208,7 +2190,7 @@
           <a:p>
             <a:pPr lvl="0"/>
             <a:r>
-              <a:rPr lang="zh-TW" altLang="en-US" smtClean="0"/>
+              <a:rPr lang="zh-TW" altLang="en-US"/>
               <a:t>按一下以編輯母片文字樣式</a:t>
             </a:r>
           </a:p>
@@ -2231,7 +2213,7 @@
           <a:p>
             <a:fld id="{1D20DF1E-6BA7-44B4-B91F-E3ABF1C171B9}" type="datetimeFigureOut">
               <a:rPr lang="zh-TW" altLang="en-US" smtClean="0"/>
-              <a:t>2022/9/24</a:t>
+              <a:t>2025/10/31</a:t>
             </a:fld>
             <a:endParaRPr lang="zh-TW" altLang="en-US"/>
           </a:p>
@@ -2329,10 +2311,9 @@
           </a:lstStyle>
           <a:p>
             <a:r>
-              <a:rPr lang="zh-TW" altLang="en-US" smtClean="0"/>
+              <a:rPr lang="zh-TW" altLang="en-US"/>
               <a:t>按一下以編輯母片標題樣式</a:t>
             </a:r>
-            <a:endParaRPr lang="zh-TW" altLang="en-US"/>
           </a:p>
         </p:txBody>
       </p:sp>
@@ -2394,10 +2375,9 @@
           </a:lstStyle>
           <a:p>
             <a:r>
-              <a:rPr lang="zh-TW" altLang="en-US" smtClean="0"/>
+              <a:rPr lang="zh-TW" altLang="en-US"/>
               <a:t>按一下圖示以新增圖片</a:t>
             </a:r>
-            <a:endParaRPr lang="zh-TW" altLang="en-US"/>
           </a:p>
         </p:txBody>
       </p:sp>
@@ -2460,7 +2440,7 @@
           <a:p>
             <a:pPr lvl="0"/>
             <a:r>
-              <a:rPr lang="zh-TW" altLang="en-US" smtClean="0"/>
+              <a:rPr lang="zh-TW" altLang="en-US"/>
               <a:t>按一下以編輯母片文字樣式</a:t>
             </a:r>
           </a:p>
@@ -2483,7 +2463,7 @@
           <a:p>
             <a:fld id="{1D20DF1E-6BA7-44B4-B91F-E3ABF1C171B9}" type="datetimeFigureOut">
               <a:rPr lang="zh-TW" altLang="en-US" smtClean="0"/>
-              <a:t>2022/9/24</a:t>
+              <a:t>2025/10/31</a:t>
             </a:fld>
             <a:endParaRPr lang="zh-TW" altLang="en-US"/>
           </a:p>
@@ -2592,10 +2572,9 @@
           <a:lstStyle/>
           <a:p>
             <a:r>
-              <a:rPr lang="zh-TW" altLang="en-US" smtClean="0"/>
+              <a:rPr lang="zh-TW" altLang="en-US"/>
               <a:t>按一下以編輯母片標題樣式</a:t>
             </a:r>
-            <a:endParaRPr lang="zh-TW" altLang="en-US"/>
           </a:p>
         </p:txBody>
       </p:sp>
@@ -2626,38 +2605,37 @@
           <a:p>
             <a:pPr lvl="0"/>
             <a:r>
-              <a:rPr lang="zh-TW" altLang="en-US" smtClean="0"/>
+              <a:rPr lang="zh-TW" altLang="en-US"/>
               <a:t>按一下以編輯母片文字樣式</a:t>
             </a:r>
           </a:p>
           <a:p>
             <a:pPr lvl="1"/>
             <a:r>
-              <a:rPr lang="zh-TW" altLang="en-US" smtClean="0"/>
+              <a:rPr lang="zh-TW" altLang="en-US"/>
               <a:t>第二層</a:t>
             </a:r>
           </a:p>
           <a:p>
             <a:pPr lvl="2"/>
             <a:r>
-              <a:rPr lang="zh-TW" altLang="en-US" smtClean="0"/>
+              <a:rPr lang="zh-TW" altLang="en-US"/>
               <a:t>第三層</a:t>
             </a:r>
           </a:p>
           <a:p>
             <a:pPr lvl="3"/>
             <a:r>
-              <a:rPr lang="zh-TW" altLang="en-US" smtClean="0"/>
+              <a:rPr lang="zh-TW" altLang="en-US"/>
               <a:t>第四層</a:t>
             </a:r>
           </a:p>
           <a:p>
             <a:pPr lvl="4"/>
             <a:r>
-              <a:rPr lang="zh-TW" altLang="en-US" smtClean="0"/>
+              <a:rPr lang="zh-TW" altLang="en-US"/>
               <a:t>第五層</a:t>
             </a:r>
-            <a:endParaRPr lang="zh-TW" altLang="en-US"/>
           </a:p>
         </p:txBody>
       </p:sp>
@@ -2696,7 +2674,7 @@
           <a:p>
             <a:fld id="{1D20DF1E-6BA7-44B4-B91F-E3ABF1C171B9}" type="datetimeFigureOut">
               <a:rPr lang="zh-TW" altLang="en-US" smtClean="0"/>
-              <a:t>2022/9/24</a:t>
+              <a:t>2025/10/31</a:t>
             </a:fld>
             <a:endParaRPr lang="zh-TW" altLang="en-US"/>
           </a:p>
@@ -3246,7 +3224,7 @@
                 <a:latin typeface="Microsoft JhengHei" panose="020B0604030504040204" pitchFamily="34" charset="-120"/>
                 <a:ea typeface="Microsoft JhengHei" panose="020B0604030504040204" pitchFamily="34" charset="-120"/>
               </a:rPr>
-              <a:t>正</a:t>
+              <a:t>正歌</a:t>
             </a:r>
             <a:r>
               <a:rPr lang="en-US" sz="4267" b="1" dirty="0">
@@ -3398,7 +3376,7 @@
                 <a:latin typeface="Microsoft JhengHei" panose="020B0604030504040204" pitchFamily="34" charset="-120"/>
                 <a:ea typeface="Microsoft JhengHei" panose="020B0604030504040204" pitchFamily="34" charset="-120"/>
               </a:rPr>
-              <a:t>正</a:t>
+              <a:t>正歌</a:t>
             </a:r>
             <a:r>
               <a:rPr lang="en-US" sz="4267" b="1" dirty="0">
@@ -3492,7 +3470,7 @@
                 <a:latin typeface="微軟正黑體" pitchFamily="34" charset="-120"/>
                 <a:ea typeface="微軟正黑體" pitchFamily="34" charset="-120"/>
               </a:rPr>
-              <a:t>袮</a:t>
+              <a:t>祢</a:t>
             </a:r>
             <a:r>
               <a:rPr lang="zh-TW" altLang="en-US" sz="6400" b="1" dirty="0">
@@ -3570,44 +3548,24 @@
               <a:t>( </a:t>
             </a:r>
             <a:r>
-              <a:rPr lang="zh-CN" altLang="en-US" sz="4267" b="1" dirty="0" smtClean="0">
+              <a:rPr lang="zh-CN" altLang="en-US" sz="4267" b="1" dirty="0">
                 <a:solidFill>
                   <a:srgbClr val="000066"/>
                 </a:solidFill>
                 <a:latin typeface="Microsoft JhengHei" panose="020B0604030504040204" pitchFamily="34" charset="-120"/>
                 <a:ea typeface="Microsoft JhengHei" panose="020B0604030504040204" pitchFamily="34" charset="-120"/>
               </a:rPr>
-              <a:t>前</a:t>
-            </a:r>
-            <a:r>
-              <a:rPr lang="zh-CN" altLang="en-US" sz="4267" b="1" dirty="0">
+              <a:t>前副歌</a:t>
+            </a:r>
+            <a:r>
+              <a:rPr lang="en-US" sz="4267" b="1" dirty="0">
                 <a:solidFill>
                   <a:srgbClr val="000066"/>
                 </a:solidFill>
                 <a:latin typeface="Microsoft JhengHei" panose="020B0604030504040204" pitchFamily="34" charset="-120"/>
                 <a:ea typeface="Microsoft JhengHei" panose="020B0604030504040204" pitchFamily="34" charset="-120"/>
               </a:rPr>
-              <a:t>副</a:t>
-            </a:r>
-            <a:r>
-              <a:rPr lang="en-US" sz="4267" b="1" dirty="0" smtClean="0">
-                <a:solidFill>
-                  <a:srgbClr val="000066"/>
-                </a:solidFill>
-                <a:latin typeface="Microsoft JhengHei" panose="020B0604030504040204" pitchFamily="34" charset="-120"/>
-                <a:ea typeface="Microsoft JhengHei" panose="020B0604030504040204" pitchFamily="34" charset="-120"/>
-              </a:rPr>
-              <a:t> </a:t>
-            </a:r>
-            <a:r>
-              <a:rPr lang="en-US" sz="4267" b="1" dirty="0">
-                <a:solidFill>
-                  <a:srgbClr val="000066"/>
-                </a:solidFill>
-                <a:latin typeface="Microsoft JhengHei" panose="020B0604030504040204" pitchFamily="34" charset="-120"/>
-                <a:ea typeface="Microsoft JhengHei" panose="020B0604030504040204" pitchFamily="34" charset="-120"/>
-              </a:rPr>
-              <a:t>)</a:t>
+              <a:t> )</a:t>
             </a:r>
             <a:endParaRPr lang="vi-VN" sz="4267" b="1" dirty="0">
               <a:solidFill>
@@ -3691,7 +3649,7 @@
                 <a:latin typeface="微軟正黑體" pitchFamily="34" charset="-120"/>
                 <a:ea typeface="微軟正黑體" pitchFamily="34" charset="-120"/>
               </a:rPr>
-              <a:t>袮</a:t>
+              <a:t>祢</a:t>
             </a:r>
             <a:r>
               <a:rPr lang="zh-TW" altLang="en-US" sz="6400" b="1" dirty="0">
@@ -3769,7 +3727,7 @@
                 <a:latin typeface="Microsoft JhengHei" panose="020B0604030504040204" pitchFamily="34" charset="-120"/>
                 <a:ea typeface="Microsoft JhengHei" panose="020B0604030504040204" pitchFamily="34" charset="-120"/>
               </a:rPr>
-              <a:t>前副</a:t>
+              <a:t>前副歌</a:t>
             </a:r>
             <a:r>
               <a:rPr lang="en-US" sz="4267" b="1" dirty="0">
@@ -3921,34 +3879,24 @@
               <a:t>( </a:t>
             </a:r>
             <a:r>
-              <a:rPr lang="zh-CN" altLang="en-US" sz="4267" b="1" dirty="0" smtClean="0">
+              <a:rPr lang="zh-CN" altLang="en-US" sz="4267" b="1" dirty="0">
                 <a:solidFill>
                   <a:srgbClr val="000066"/>
                 </a:solidFill>
                 <a:latin typeface="Microsoft JhengHei" panose="020B0604030504040204" pitchFamily="34" charset="-120"/>
                 <a:ea typeface="Microsoft JhengHei" panose="020B0604030504040204" pitchFamily="34" charset="-120"/>
               </a:rPr>
-              <a:t>副</a:t>
-            </a:r>
-            <a:r>
-              <a:rPr lang="en-US" sz="4267" b="1" dirty="0" smtClean="0">
+              <a:t>副歌</a:t>
+            </a:r>
+            <a:r>
+              <a:rPr lang="en-US" sz="4267" b="1" dirty="0">
                 <a:solidFill>
                   <a:srgbClr val="000066"/>
                 </a:solidFill>
                 <a:latin typeface="Microsoft JhengHei" panose="020B0604030504040204" pitchFamily="34" charset="-120"/>
                 <a:ea typeface="Microsoft JhengHei" panose="020B0604030504040204" pitchFamily="34" charset="-120"/>
               </a:rPr>
-              <a:t> </a:t>
-            </a:r>
-            <a:r>
-              <a:rPr lang="en-US" sz="4267" b="1" dirty="0">
-                <a:solidFill>
-                  <a:srgbClr val="000066"/>
-                </a:solidFill>
-                <a:latin typeface="Microsoft JhengHei" panose="020B0604030504040204" pitchFamily="34" charset="-120"/>
-                <a:ea typeface="Microsoft JhengHei" panose="020B0604030504040204" pitchFamily="34" charset="-120"/>
-              </a:rPr>
-              <a:t>)</a:t>
+              <a:t> )</a:t>
             </a:r>
             <a:endParaRPr lang="vi-VN" sz="4267" b="1" dirty="0">
               <a:solidFill>
@@ -4044,7 +3992,7 @@
                 <a:latin typeface="微軟正黑體" pitchFamily="34" charset="-120"/>
                 <a:ea typeface="微軟正黑體" pitchFamily="34" charset="-120"/>
               </a:rPr>
-              <a:t>袮</a:t>
+              <a:t>祢</a:t>
             </a:r>
             <a:r>
               <a:rPr lang="zh-TW" altLang="en-US" sz="6400" b="1" dirty="0">
@@ -4100,7 +4048,7 @@
                 <a:latin typeface="Microsoft JhengHei" panose="020B0604030504040204" pitchFamily="34" charset="-120"/>
                 <a:ea typeface="Microsoft JhengHei" panose="020B0604030504040204" pitchFamily="34" charset="-120"/>
               </a:rPr>
-              <a:t>副</a:t>
+              <a:t>副歌</a:t>
             </a:r>
             <a:r>
               <a:rPr lang="en-US" sz="4267" b="1" dirty="0">
